--- a/Melgar_Powerpoint3.pptx
+++ b/Melgar_Powerpoint3.pptx
@@ -18018,7 +18018,7 @@
           <a:p>
             <a:r>
               <a:rPr lang="en-US" dirty="0"/>
-              <a:t>In-store sales show clear growth and  </a:t>
+              <a:t>In-store sales show clear growth trend  </a:t>
             </a:r>
           </a:p>
         </p:txBody>
@@ -18465,7 +18465,7 @@
             </a:pPr>
             <a:r>
               <a:rPr lang="en-US" dirty="0"/>
-              <a:t>Connecticut shows 35.55% of regional sales= $20M</a:t>
+              <a:t>Connecticut shows 35.55% of regional sales= $2.3M</a:t>
             </a:r>
           </a:p>
           <a:p>
